--- a/examples/02_clean_energy_esg/Presentation.pptx
+++ b/examples/02_clean_energy_esg/Presentation.pptx
@@ -7,11 +7,9 @@
   <p:sldIdLst>
     <p:sldId id="256" r:id="rId2"/>
     <p:sldId id="257" r:id="rId3"/>
-    <p:sldId id="258" r:id="rId4"/>
-    <p:sldId id="259" r:id="rId5"/>
   </p:sldIdLst>
   <p:notesMasterIdLst>
-    <p:notesMasterId r:id="rId6"/>
+    <p:notesMasterId r:id="rId4"/>
   </p:notesMasterIdLst>
   <p:sldSz cx="12192000" cy="6858000"/>
   <p:notesSz cx="6858000" cy="12192000"/>
@@ -505,8 +503,8 @@
           <a:p>
             <a:r>
               <a:rPr lang="en-US" dirty="0"/>
-              <a:t>1. Hero
-note: [오프닝] 2030 탄소중립을 위한 지능형 재생에너지 분산 전력망 모델을 소개합니다.</a:t>
+              <a:t>Slide 1: Editorial Clean Cover
+note: 재생에너지 2030 탄소중립 로드맵의 비전과 3대 정량 목표입니다.</a:t>
             </a:r>
             <a:endParaRPr lang="en-US" dirty="0"/>
           </a:p>
@@ -594,8 +592,8 @@
           <a:p>
             <a:r>
               <a:rPr lang="en-US" dirty="0"/>
-              <a:t>2. Breakdown
-note: [핵심 해법] 3대 해법으로 발전 제약을 해소하고 전력망을 안정화합니다.</a:t>
+              <a:t>Slide 2: Horizontal Timeline 3 Steps
+note: 2026년부터 2030년까지 3단계에 걸친 전력망 전환 타임라인입니다.</a:t>
             </a:r>
             <a:endParaRPr lang="en-US" dirty="0"/>
           </a:p>
@@ -619,184 +617,6 @@
             <a:fld id="{F7021451-1387-4CA6-816F-3879F97B5CBC}" type="slidenum">
               <a:rPr lang="en-US"/>
               <a:t>2</a:t>
-            </a:fld>
-            <a:endParaRPr lang="en-US"/>
-          </a:p>
-        </p:txBody>
-      </p:sp>
-    </p:spTree>
-    <p:extLst>
-      <p:ext uri="{BB962C8B-B14F-4D97-AF65-F5344CB8AC3E}">
-        <p14:creationId xmlns:p14="http://schemas.microsoft.com/office/powerpoint/2010/main" val="1024086991"/>
-      </p:ext>
-    </p:extLst>
-  </p:cSld>
-  <p:clrMapOvr>
-    <a:masterClrMapping/>
-  </p:clrMapOvr>
-</p:notes>
-</file>
-
-<file path=ppt/notesSlides/notesSlide3.xml><?xml version="1.0" encoding="utf-8"?>
-<p:notes xmlns:a="http://schemas.openxmlformats.org/drawingml/2006/main" xmlns:r="http://schemas.openxmlformats.org/officeDocument/2006/relationships" xmlns:p="http://schemas.openxmlformats.org/presentationml/2006/main">
-  <p:cSld>
-    <p:spTree>
-      <p:nvGrpSpPr>
-        <p:cNvPr id="1" name=""/>
-        <p:cNvGrpSpPr/>
-        <p:nvPr/>
-      </p:nvGrpSpPr>
-      <p:grpSpPr>
-        <a:xfrm>
-          <a:off x="0" y="0"/>
-          <a:ext cx="0" cy="0"/>
-          <a:chOff x="0" y="0"/>
-          <a:chExt cx="0" cy="0"/>
-        </a:xfrm>
-      </p:grpSpPr>
-      <p:sp>
-        <p:nvSpPr>
-          <p:cNvPr id="2" name="Slide Image Placeholder 1"/>
-          <p:cNvSpPr>
-            <a:spLocks noGrp="1" noRot="1" noChangeAspect="1"/>
-          </p:cNvSpPr>
-          <p:nvPr>
-            <p:ph type="sldImg"/>
-          </p:nvPr>
-        </p:nvSpPr>
-        <p:spPr/>
-      </p:sp>
-      <p:sp>
-        <p:nvSpPr>
-          <p:cNvPr id="3" name="Notes Placeholder 2"/>
-          <p:cNvSpPr>
-            <a:spLocks noGrp="1"/>
-          </p:cNvSpPr>
-          <p:nvPr>
-            <p:ph type="body" idx="1"/>
-          </p:nvPr>
-        </p:nvSpPr>
-        <p:spPr/>
-        <p:txBody>
-          <a:bodyPr/>
-          <a:lstStyle/>
-          <a:p>
-            <a:r>
-              <a:rPr lang="en-US" dirty="0"/>
-              <a:t>3. Big Stats
-note: [정량 지표] 온실가스 48.5% 감축과 출력 제어 0%를 달성할 것입니다.</a:t>
-            </a:r>
-            <a:endParaRPr lang="en-US" dirty="0"/>
-          </a:p>
-        </p:txBody>
-      </p:sp>
-      <p:sp>
-        <p:nvSpPr>
-          <p:cNvPr id="4" name="Slide Number Placeholder 3"/>
-          <p:cNvSpPr>
-            <a:spLocks noGrp="1"/>
-          </p:cNvSpPr>
-          <p:nvPr>
-            <p:ph type="sldNum" sz="quarter" idx="10"/>
-          </p:nvPr>
-        </p:nvSpPr>
-        <p:spPr/>
-        <p:txBody>
-          <a:bodyPr/>
-          <a:lstStyle/>
-          <a:p>
-            <a:fld id="{F7021451-1387-4CA6-816F-3879F97B5CBC}" type="slidenum">
-              <a:rPr lang="en-US"/>
-              <a:t>3</a:t>
-            </a:fld>
-            <a:endParaRPr lang="en-US"/>
-          </a:p>
-        </p:txBody>
-      </p:sp>
-    </p:spTree>
-    <p:extLst>
-      <p:ext uri="{BB962C8B-B14F-4D97-AF65-F5344CB8AC3E}">
-        <p14:creationId xmlns:p14="http://schemas.microsoft.com/office/powerpoint/2010/main" val="1024086991"/>
-      </p:ext>
-    </p:extLst>
-  </p:cSld>
-  <p:clrMapOvr>
-    <a:masterClrMapping/>
-  </p:clrMapOvr>
-</p:notes>
-</file>
-
-<file path=ppt/notesSlides/notesSlide4.xml><?xml version="1.0" encoding="utf-8"?>
-<p:notes xmlns:a="http://schemas.openxmlformats.org/drawingml/2006/main" xmlns:r="http://schemas.openxmlformats.org/officeDocument/2006/relationships" xmlns:p="http://schemas.openxmlformats.org/presentationml/2006/main">
-  <p:cSld>
-    <p:spTree>
-      <p:nvGrpSpPr>
-        <p:cNvPr id="1" name=""/>
-        <p:cNvGrpSpPr/>
-        <p:nvPr/>
-      </p:nvGrpSpPr>
-      <p:grpSpPr>
-        <a:xfrm>
-          <a:off x="0" y="0"/>
-          <a:ext cx="0" cy="0"/>
-          <a:chOff x="0" y="0"/>
-          <a:chExt cx="0" cy="0"/>
-        </a:xfrm>
-      </p:grpSpPr>
-      <p:sp>
-        <p:nvSpPr>
-          <p:cNvPr id="2" name="Slide Image Placeholder 1"/>
-          <p:cNvSpPr>
-            <a:spLocks noGrp="1" noRot="1" noChangeAspect="1"/>
-          </p:cNvSpPr>
-          <p:nvPr>
-            <p:ph type="sldImg"/>
-          </p:nvPr>
-        </p:nvSpPr>
-        <p:spPr/>
-      </p:sp>
-      <p:sp>
-        <p:nvSpPr>
-          <p:cNvPr id="3" name="Notes Placeholder 2"/>
-          <p:cNvSpPr>
-            <a:spLocks noGrp="1"/>
-          </p:cNvSpPr>
-          <p:nvPr>
-            <p:ph type="body" idx="1"/>
-          </p:nvPr>
-        </p:nvSpPr>
-        <p:spPr/>
-        <p:txBody>
-          <a:bodyPr/>
-          <a:lstStyle/>
-          <a:p>
-            <a:r>
-              <a:rPr lang="en-US" dirty="0"/>
-              <a:t>4. Closing
-note: [마무리] 깨끗한 미래를 위한 질의응답 시간을 갖겠습니다. 감사합니다.</a:t>
-            </a:r>
-            <a:endParaRPr lang="en-US" dirty="0"/>
-          </a:p>
-        </p:txBody>
-      </p:sp>
-      <p:sp>
-        <p:nvSpPr>
-          <p:cNvPr id="4" name="Slide Number Placeholder 3"/>
-          <p:cNvSpPr>
-            <a:spLocks noGrp="1"/>
-          </p:cNvSpPr>
-          <p:nvPr>
-            <p:ph type="sldNum" sz="quarter" idx="10"/>
-          </p:nvPr>
-        </p:nvSpPr>
-        <p:spPr/>
-        <p:txBody>
-          <a:bodyPr/>
-          <a:lstStyle/>
-          <a:p>
-            <a:fld id="{F7021451-1387-4CA6-816F-3879F97B5CBC}" type="slidenum">
-              <a:rPr lang="en-US"/>
-              <a:t>4</a:t>
             </a:fld>
             <a:endParaRPr lang="en-US"/>
           </a:p>
@@ -1164,84 +984,6 @@
 <file path=ppt/slides/slide2.xml><?xml version="1.0" encoding="utf-8"?>
 <p:sld xmlns:a="http://schemas.openxmlformats.org/drawingml/2006/main" xmlns:r="http://schemas.openxmlformats.org/officeDocument/2006/relationships" xmlns:p="http://schemas.openxmlformats.org/presentationml/2006/main">
   <p:cSld name="Slide 2">
-    <p:bg>
-      <p:bgPr>
-        <a:blipFill dpi="0" rotWithShape="1">
-          <a:blip r:embed="rId1">
-            <a:lum/>
-          </a:blip>
-          <a:srcRect/>
-          <a:stretch>
-            <a:fillRect/>
-          </a:stretch>
-        </a:blipFill>
-        <a:effectLst/>
-      </p:bgPr>
-    </p:bg>
-    <p:spTree>
-      <p:nvGrpSpPr>
-        <p:cNvPr id="1" name=""/>
-        <p:cNvGrpSpPr/>
-        <p:nvPr/>
-      </p:nvGrpSpPr>
-      <p:grpSpPr>
-        <a:xfrm>
-          <a:off x="0" y="0"/>
-          <a:ext cx="0" cy="0"/>
-          <a:chOff x="0" y="0"/>
-          <a:chExt cx="0" cy="0"/>
-        </a:xfrm>
-      </p:grpSpPr>
-    </p:spTree>
-  </p:cSld>
-  <p:clrMapOvr>
-    <a:masterClrMapping/>
-  </p:clrMapOvr>
-</p:sld>
-</file>
-
-<file path=ppt/slides/slide3.xml><?xml version="1.0" encoding="utf-8"?>
-<p:sld xmlns:a="http://schemas.openxmlformats.org/drawingml/2006/main" xmlns:r="http://schemas.openxmlformats.org/officeDocument/2006/relationships" xmlns:p="http://schemas.openxmlformats.org/presentationml/2006/main">
-  <p:cSld name="Slide 3">
-    <p:bg>
-      <p:bgPr>
-        <a:blipFill dpi="0" rotWithShape="1">
-          <a:blip r:embed="rId1">
-            <a:lum/>
-          </a:blip>
-          <a:srcRect/>
-          <a:stretch>
-            <a:fillRect/>
-          </a:stretch>
-        </a:blipFill>
-        <a:effectLst/>
-      </p:bgPr>
-    </p:bg>
-    <p:spTree>
-      <p:nvGrpSpPr>
-        <p:cNvPr id="1" name=""/>
-        <p:cNvGrpSpPr/>
-        <p:nvPr/>
-      </p:nvGrpSpPr>
-      <p:grpSpPr>
-        <a:xfrm>
-          <a:off x="0" y="0"/>
-          <a:ext cx="0" cy="0"/>
-          <a:chOff x="0" y="0"/>
-          <a:chExt cx="0" cy="0"/>
-        </a:xfrm>
-      </p:grpSpPr>
-    </p:spTree>
-  </p:cSld>
-  <p:clrMapOvr>
-    <a:masterClrMapping/>
-  </p:clrMapOvr>
-</p:sld>
-</file>
-
-<file path=ppt/slides/slide4.xml><?xml version="1.0" encoding="utf-8"?>
-<p:sld xmlns:a="http://schemas.openxmlformats.org/drawingml/2006/main" xmlns:r="http://schemas.openxmlformats.org/officeDocument/2006/relationships" xmlns:p="http://schemas.openxmlformats.org/presentationml/2006/main">
-  <p:cSld name="Slide 4">
     <p:bg>
       <p:bgPr>
         <a:blipFill dpi="0" rotWithShape="1">

--- a/examples/02_clean_energy_esg/Presentation.pptx
+++ b/examples/02_clean_energy_esg/Presentation.pptx
@@ -503,8 +503,7 @@
           <a:p>
             <a:r>
               <a:rPr lang="en-US" dirty="0"/>
-              <a:t>Slide 1: Editorial Clean Cover
-note: 재생에너지 2030 탄소중립 로드맵의 비전과 3대 정량 목표입니다.</a:t>
+              <a:t>재생에너지 2030 탄소중립 로드맵의 비전과 3대 정량 목표입니다.</a:t>
             </a:r>
             <a:endParaRPr lang="en-US" dirty="0"/>
           </a:p>
@@ -592,8 +591,7 @@
           <a:p>
             <a:r>
               <a:rPr lang="en-US" dirty="0"/>
-              <a:t>Slide 2: Horizontal Timeline 3 Steps
-note: 2026년부터 2030년까지 3단계에 걸친 전력망 전환 타임라인입니다.</a:t>
+              <a:t>2026년부터 2030년까지 3단계에 걸친 전력망 전환 타임라인입니다.</a:t>
             </a:r>
             <a:endParaRPr lang="en-US" dirty="0"/>
           </a:p>
@@ -947,16 +945,9 @@
   <p:cSld name="Slide 1">
     <p:bg>
       <p:bgPr>
-        <a:blipFill dpi="0" rotWithShape="1">
-          <a:blip r:embed="rId1">
-            <a:lum/>
-          </a:blip>
-          <a:srcRect/>
-          <a:stretch>
-            <a:fillRect/>
-          </a:stretch>
-        </a:blipFill>
-        <a:effectLst/>
+        <a:solidFill>
+          <a:srgbClr val="0B1911"/>
+        </a:solidFill>
       </p:bgPr>
     </p:bg>
     <p:spTree>
@@ -973,6 +964,491 @@
           <a:chExt cx="0" cy="0"/>
         </a:xfrm>
       </p:grpSpPr>
+      <p:sp>
+        <p:nvSpPr>
+          <p:cNvPr id="2" name="Shape 0"/>
+          <p:cNvSpPr/>
+          <p:nvPr/>
+        </p:nvSpPr>
+        <p:spPr>
+          <a:xfrm>
+            <a:off x="571500" y="495330"/>
+            <a:ext cx="2150486" cy="393466"/>
+          </a:xfrm>
+          <a:prstGeom prst="roundRect">
+            <a:avLst>
+              <a:gd name="adj" fmla="val 48408"/>
+            </a:avLst>
+          </a:prstGeom>
+          <a:solidFill>
+            <a:srgbClr val="064E3B"/>
+          </a:solidFill>
+          <a:ln w="9525">
+            <a:solidFill>
+              <a:srgbClr val="10B981"/>
+            </a:solidFill>
+            <a:prstDash val="solid"/>
+          </a:ln>
+        </p:spPr>
+      </p:sp>
+      <p:sp>
+        <p:nvSpPr>
+          <p:cNvPr id="3" name="Text 1"/>
+          <p:cNvSpPr txBox="1"/>
+          <p:nvPr/>
+        </p:nvSpPr>
+        <p:spPr>
+          <a:xfrm>
+            <a:off x="676290" y="541416"/>
+            <a:ext cx="2074042" cy="298369"/>
+          </a:xfrm>
+          <a:prstGeom prst="rect">
+            <a:avLst/>
+          </a:prstGeom>
+          <a:noFill/>
+          <a:ln/>
+        </p:spPr>
+        <p:txBody>
+          <a:bodyPr wrap="none" lIns="0" tIns="0" rIns="0" bIns="0" rtlCol="0" anchor="t"/>
+          <a:lstStyle/>
+          <a:p>
+            <a:pPr algn="l" indent="0" marL="0">
+              <a:lnSpc>
+                <a:spcPts val="2349"/>
+              </a:lnSpc>
+              <a:buNone/>
+            </a:pPr>
+            <a:r>
+              <a:rPr lang="en-US" sz="1566" b="1" spc="-54" kern="0" dirty="0">
+                <a:solidFill>
+                  <a:srgbClr val="34D399"/>
+                </a:solidFill>
+                <a:latin typeface="Malgun Gothic" pitchFamily="34" charset="0"/>
+                <a:ea typeface="Malgun Gothic" pitchFamily="34" charset="-122"/>
+                <a:cs typeface="Malgun Gothic" pitchFamily="34" charset="-120"/>
+              </a:rPr>
+              <a:t>ESG ROADMAP 2030</a:t>
+            </a:r>
+            <a:endParaRPr lang="en-US" sz="1566" dirty="0"/>
+          </a:p>
+        </p:txBody>
+      </p:sp>
+      <p:sp>
+        <p:nvSpPr>
+          <p:cNvPr id="4" name="Text 2"/>
+          <p:cNvSpPr txBox="1"/>
+          <p:nvPr/>
+        </p:nvSpPr>
+        <p:spPr>
+          <a:xfrm>
+            <a:off x="552480" y="956554"/>
+            <a:ext cx="11087100" cy="1519276"/>
+          </a:xfrm>
+          <a:prstGeom prst="rect">
+            <a:avLst/>
+          </a:prstGeom>
+          <a:noFill/>
+          <a:ln/>
+        </p:spPr>
+        <p:txBody>
+          <a:bodyPr wrap="square" lIns="0" tIns="0" rIns="0" bIns="0" rtlCol="0" anchor="t"/>
+          <a:lstStyle/>
+          <a:p>
+            <a:pPr algn="l" indent="0" marL="0">
+              <a:lnSpc>
+                <a:spcPts val="5981"/>
+              </a:lnSpc>
+              <a:buNone/>
+            </a:pPr>
+            <a:r>
+              <a:rPr lang="en-US" sz="4785" b="1" spc="-54" kern="0" dirty="0">
+                <a:solidFill>
+                  <a:srgbClr val="ECFDF5"/>
+                </a:solidFill>
+                <a:latin typeface="Malgun Gothic" pitchFamily="34" charset="0"/>
+                <a:ea typeface="Malgun Gothic" pitchFamily="34" charset="-122"/>
+                <a:cs typeface="Malgun Gothic" pitchFamily="34" charset="-120"/>
+              </a:rPr>
+              <a:t>지능형 재생에너지 전력망과</a:t>
+            </a:r>
+            <a:endParaRPr lang="en-US" sz="4785" dirty="0"/>
+          </a:p>
+          <a:p>
+            <a:pPr algn="l" indent="0" marL="0">
+              <a:lnSpc>
+                <a:spcPts val="5981"/>
+              </a:lnSpc>
+              <a:buNone/>
+            </a:pPr>
+            <a:r>
+              <a:rPr lang="en-US" sz="4785" b="1" spc="-54" kern="0" dirty="0">
+                <a:solidFill>
+                  <a:srgbClr val="34D399"/>
+                </a:solidFill>
+                <a:latin typeface="Malgun Gothic" pitchFamily="34" charset="0"/>
+                <a:ea typeface="Malgun Gothic" pitchFamily="34" charset="-122"/>
+                <a:cs typeface="Malgun Gothic" pitchFamily="34" charset="-120"/>
+              </a:rPr>
+              <a:t>2030 탄소중립 실현 로드맵</a:t>
+            </a:r>
+            <a:endParaRPr lang="en-US" sz="4785" dirty="0"/>
+          </a:p>
+        </p:txBody>
+      </p:sp>
+      <p:sp>
+        <p:nvSpPr>
+          <p:cNvPr id="5" name="Text 3"/>
+          <p:cNvSpPr txBox="1"/>
+          <p:nvPr/>
+        </p:nvSpPr>
+        <p:spPr>
+          <a:xfrm>
+            <a:off x="552480" y="2738537"/>
+            <a:ext cx="11951940" cy="217170"/>
+          </a:xfrm>
+          <a:prstGeom prst="rect">
+            <a:avLst/>
+          </a:prstGeom>
+          <a:noFill/>
+          <a:ln/>
+        </p:spPr>
+        <p:txBody>
+          <a:bodyPr wrap="none" lIns="0" tIns="0" rIns="0" bIns="0" rtlCol="0" anchor="t"/>
+          <a:lstStyle/>
+          <a:p>
+            <a:pPr algn="l" indent="0" marL="0">
+              <a:lnSpc>
+                <a:spcPts val="1710"/>
+              </a:lnSpc>
+              <a:buNone/>
+            </a:pPr>
+            <a:r>
+              <a:rPr lang="en-US" sz="1140" spc="-54" kern="0" dirty="0">
+                <a:solidFill>
+                  <a:srgbClr val="A7F3D0"/>
+                </a:solidFill>
+                <a:latin typeface="Malgun Gothic" pitchFamily="34" charset="0"/>
+                <a:ea typeface="Malgun Gothic" pitchFamily="34" charset="-122"/>
+                <a:cs typeface="Malgun Gothic" pitchFamily="34" charset="-120"/>
+              </a:rPr>
+              <a:t>풍력·태양광의 간헐성을 AI 가상발전소(VPP)와 대용량 ESS로 능동 제어하는 친환경 에너지 전환</a:t>
+            </a:r>
+            <a:endParaRPr lang="en-US" sz="1140" dirty="0"/>
+          </a:p>
+        </p:txBody>
+      </p:sp>
+      <p:sp>
+        <p:nvSpPr>
+          <p:cNvPr id="6" name="Shape 4"/>
+          <p:cNvSpPr/>
+          <p:nvPr/>
+        </p:nvSpPr>
+        <p:spPr>
+          <a:xfrm>
+            <a:off x="571500" y="5625023"/>
+            <a:ext cx="11048970" cy="9510"/>
+          </a:xfrm>
+          <a:prstGeom prst="rect">
+            <a:avLst/>
+          </a:prstGeom>
+          <a:solidFill>
+            <a:srgbClr val="064E3B"/>
+          </a:solidFill>
+          <a:ln/>
+        </p:spPr>
+      </p:sp>
+      <p:sp>
+        <p:nvSpPr>
+          <p:cNvPr id="7" name="Text 5"/>
+          <p:cNvSpPr txBox="1"/>
+          <p:nvPr/>
+        </p:nvSpPr>
+        <p:spPr>
+          <a:xfrm>
+            <a:off x="552480" y="5818876"/>
+            <a:ext cx="1782166" cy="164592"/>
+          </a:xfrm>
+          <a:prstGeom prst="rect">
+            <a:avLst/>
+          </a:prstGeom>
+          <a:noFill/>
+          <a:ln/>
+        </p:spPr>
+        <p:txBody>
+          <a:bodyPr wrap="none" lIns="0" tIns="0" rIns="0" bIns="0" rtlCol="0" anchor="t"/>
+          <a:lstStyle/>
+          <a:p>
+            <a:pPr algn="l" indent="0" marL="0">
+              <a:lnSpc>
+                <a:spcPts val="1296"/>
+              </a:lnSpc>
+              <a:buNone/>
+            </a:pPr>
+            <a:r>
+              <a:rPr lang="en-US" sz="864" b="1" spc="-54" kern="0" dirty="0">
+                <a:solidFill>
+                  <a:srgbClr val="6EE7B7"/>
+                </a:solidFill>
+                <a:latin typeface="Malgun Gothic" pitchFamily="34" charset="0"/>
+                <a:ea typeface="Malgun Gothic" pitchFamily="34" charset="-122"/>
+                <a:cs typeface="Malgun Gothic" pitchFamily="34" charset="-120"/>
+              </a:rPr>
+              <a:t>TARGET EMISSIONS</a:t>
+            </a:r>
+            <a:endParaRPr lang="en-US" sz="864" dirty="0"/>
+          </a:p>
+        </p:txBody>
+      </p:sp>
+      <p:sp>
+        <p:nvSpPr>
+          <p:cNvPr id="8" name="Text 6"/>
+          <p:cNvSpPr txBox="1"/>
+          <p:nvPr/>
+        </p:nvSpPr>
+        <p:spPr>
+          <a:xfrm>
+            <a:off x="552480" y="5983742"/>
+            <a:ext cx="1782166" cy="411480"/>
+          </a:xfrm>
+          <a:prstGeom prst="rect">
+            <a:avLst/>
+          </a:prstGeom>
+          <a:noFill/>
+          <a:ln/>
+        </p:spPr>
+        <p:txBody>
+          <a:bodyPr wrap="none" lIns="0" tIns="0" rIns="0" bIns="0" rtlCol="0" anchor="t"/>
+          <a:lstStyle/>
+          <a:p>
+            <a:pPr algn="l" indent="0" marL="0">
+              <a:lnSpc>
+                <a:spcPts val="3240"/>
+              </a:lnSpc>
+              <a:buNone/>
+            </a:pPr>
+            <a:r>
+              <a:rPr lang="en-US" sz="2160" b="1" spc="-54" kern="0" dirty="0">
+                <a:solidFill>
+                  <a:srgbClr val="FFFFFF"/>
+                </a:solidFill>
+                <a:latin typeface="Malgun Gothic" pitchFamily="34" charset="0"/>
+                <a:ea typeface="Malgun Gothic" pitchFamily="34" charset="-122"/>
+                <a:cs typeface="Malgun Gothic" pitchFamily="34" charset="-120"/>
+              </a:rPr>
+              <a:t>-48.5% GHG</a:t>
+            </a:r>
+            <a:endParaRPr lang="en-US" sz="2160" dirty="0"/>
+          </a:p>
+        </p:txBody>
+      </p:sp>
+      <p:sp>
+        <p:nvSpPr>
+          <p:cNvPr id="9" name="Shape 7"/>
+          <p:cNvSpPr/>
+          <p:nvPr/>
+        </p:nvSpPr>
+        <p:spPr>
+          <a:xfrm>
+            <a:off x="2508748" y="5825002"/>
+            <a:ext cx="9510" cy="575798"/>
+          </a:xfrm>
+          <a:prstGeom prst="rect">
+            <a:avLst/>
+          </a:prstGeom>
+          <a:solidFill>
+            <a:srgbClr val="064E3B"/>
+          </a:solidFill>
+          <a:ln/>
+        </p:spPr>
+      </p:sp>
+      <p:sp>
+        <p:nvSpPr>
+          <p:cNvPr id="10" name="Text 8"/>
+          <p:cNvSpPr txBox="1"/>
+          <p:nvPr/>
+        </p:nvSpPr>
+        <p:spPr>
+          <a:xfrm>
+            <a:off x="2804099" y="5818876"/>
+            <a:ext cx="1327526" cy="164592"/>
+          </a:xfrm>
+          <a:prstGeom prst="rect">
+            <a:avLst/>
+          </a:prstGeom>
+          <a:noFill/>
+          <a:ln/>
+        </p:spPr>
+        <p:txBody>
+          <a:bodyPr wrap="none" lIns="0" tIns="0" rIns="0" bIns="0" rtlCol="0" anchor="t"/>
+          <a:lstStyle/>
+          <a:p>
+            <a:pPr algn="l" indent="0" marL="0">
+              <a:lnSpc>
+                <a:spcPts val="1296"/>
+              </a:lnSpc>
+              <a:buNone/>
+            </a:pPr>
+            <a:r>
+              <a:rPr lang="en-US" sz="864" b="1" spc="-54" kern="0" dirty="0">
+                <a:solidFill>
+                  <a:srgbClr val="6EE7B7"/>
+                </a:solidFill>
+                <a:latin typeface="Malgun Gothic" pitchFamily="34" charset="0"/>
+                <a:ea typeface="Malgun Gothic" pitchFamily="34" charset="-122"/>
+                <a:cs typeface="Malgun Gothic" pitchFamily="34" charset="-120"/>
+              </a:rPr>
+              <a:t>GRID RELIABILITY</a:t>
+            </a:r>
+            <a:endParaRPr lang="en-US" sz="864" dirty="0"/>
+          </a:p>
+        </p:txBody>
+      </p:sp>
+      <p:sp>
+        <p:nvSpPr>
+          <p:cNvPr id="11" name="Text 9"/>
+          <p:cNvSpPr txBox="1"/>
+          <p:nvPr/>
+        </p:nvSpPr>
+        <p:spPr>
+          <a:xfrm>
+            <a:off x="2804099" y="5983742"/>
+            <a:ext cx="1327526" cy="411480"/>
+          </a:xfrm>
+          <a:prstGeom prst="rect">
+            <a:avLst/>
+          </a:prstGeom>
+          <a:noFill/>
+          <a:ln/>
+        </p:spPr>
+        <p:txBody>
+          <a:bodyPr wrap="none" lIns="0" tIns="0" rIns="0" bIns="0" rtlCol="0" anchor="t"/>
+          <a:lstStyle/>
+          <a:p>
+            <a:pPr algn="l" indent="0" marL="0">
+              <a:lnSpc>
+                <a:spcPts val="3240"/>
+              </a:lnSpc>
+              <a:buNone/>
+            </a:pPr>
+            <a:r>
+              <a:rPr lang="en-US" sz="2160" b="1" spc="-54" kern="0" dirty="0">
+                <a:solidFill>
+                  <a:srgbClr val="FFFFFF"/>
+                </a:solidFill>
+                <a:latin typeface="Malgun Gothic" pitchFamily="34" charset="0"/>
+                <a:ea typeface="Malgun Gothic" pitchFamily="34" charset="-122"/>
+                <a:cs typeface="Malgun Gothic" pitchFamily="34" charset="-120"/>
+              </a:rPr>
+              <a:t>99.999%</a:t>
+            </a:r>
+            <a:endParaRPr lang="en-US" sz="2160" dirty="0"/>
+          </a:p>
+        </p:txBody>
+      </p:sp>
+      <p:sp>
+        <p:nvSpPr>
+          <p:cNvPr id="12" name="Shape 10"/>
+          <p:cNvSpPr/>
+          <p:nvPr/>
+        </p:nvSpPr>
+        <p:spPr>
+          <a:xfrm>
+            <a:off x="4339468" y="5825002"/>
+            <a:ext cx="9510" cy="575798"/>
+          </a:xfrm>
+          <a:prstGeom prst="rect">
+            <a:avLst/>
+          </a:prstGeom>
+          <a:solidFill>
+            <a:srgbClr val="064E3B"/>
+          </a:solidFill>
+          <a:ln/>
+        </p:spPr>
+      </p:sp>
+      <p:sp>
+        <p:nvSpPr>
+          <p:cNvPr id="13" name="Text 11"/>
+          <p:cNvSpPr txBox="1"/>
+          <p:nvPr/>
+        </p:nvSpPr>
+        <p:spPr>
+          <a:xfrm>
+            <a:off x="4634728" y="5818876"/>
+            <a:ext cx="1965228" cy="164592"/>
+          </a:xfrm>
+          <a:prstGeom prst="rect">
+            <a:avLst/>
+          </a:prstGeom>
+          <a:noFill/>
+          <a:ln/>
+        </p:spPr>
+        <p:txBody>
+          <a:bodyPr wrap="none" lIns="0" tIns="0" rIns="0" bIns="0" rtlCol="0" anchor="t"/>
+          <a:lstStyle/>
+          <a:p>
+            <a:pPr algn="l" indent="0" marL="0">
+              <a:lnSpc>
+                <a:spcPts val="1296"/>
+              </a:lnSpc>
+              <a:buNone/>
+            </a:pPr>
+            <a:r>
+              <a:rPr lang="en-US" sz="864" b="1" spc="-54" kern="0" dirty="0">
+                <a:solidFill>
+                  <a:srgbClr val="6EE7B7"/>
+                </a:solidFill>
+                <a:latin typeface="Malgun Gothic" pitchFamily="34" charset="0"/>
+                <a:ea typeface="Malgun Gothic" pitchFamily="34" charset="-122"/>
+                <a:cs typeface="Malgun Gothic" pitchFamily="34" charset="-120"/>
+              </a:rPr>
+              <a:t>RE100 COMPLIANCE</a:t>
+            </a:r>
+            <a:endParaRPr lang="en-US" sz="864" dirty="0"/>
+          </a:p>
+        </p:txBody>
+      </p:sp>
+      <p:sp>
+        <p:nvSpPr>
+          <p:cNvPr id="14" name="Text 12"/>
+          <p:cNvSpPr txBox="1"/>
+          <p:nvPr/>
+        </p:nvSpPr>
+        <p:spPr>
+          <a:xfrm>
+            <a:off x="4634728" y="5983742"/>
+            <a:ext cx="1965228" cy="411480"/>
+          </a:xfrm>
+          <a:prstGeom prst="rect">
+            <a:avLst/>
+          </a:prstGeom>
+          <a:noFill/>
+          <a:ln/>
+        </p:spPr>
+        <p:txBody>
+          <a:bodyPr wrap="none" lIns="0" tIns="0" rIns="0" bIns="0" rtlCol="0" anchor="t"/>
+          <a:lstStyle/>
+          <a:p>
+            <a:pPr algn="l" indent="0" marL="0">
+              <a:lnSpc>
+                <a:spcPts val="3240"/>
+              </a:lnSpc>
+              <a:buNone/>
+            </a:pPr>
+            <a:r>
+              <a:rPr lang="en-US" sz="2160" b="1" spc="-54" kern="0" dirty="0">
+                <a:solidFill>
+                  <a:srgbClr val="34D399"/>
+                </a:solidFill>
+                <a:latin typeface="Malgun Gothic" pitchFamily="34" charset="0"/>
+                <a:ea typeface="Malgun Gothic" pitchFamily="34" charset="-122"/>
+                <a:cs typeface="Malgun Gothic" pitchFamily="34" charset="-120"/>
+              </a:rPr>
+              <a:t>100% MATCH</a:t>
+            </a:r>
+            <a:endParaRPr lang="en-US" sz="2160" dirty="0"/>
+          </a:p>
+        </p:txBody>
+      </p:sp>
     </p:spTree>
   </p:cSld>
   <p:clrMapOvr>
@@ -986,16 +1462,9 @@
   <p:cSld name="Slide 2">
     <p:bg>
       <p:bgPr>
-        <a:blipFill dpi="0" rotWithShape="1">
-          <a:blip r:embed="rId1">
-            <a:lum/>
-          </a:blip>
-          <a:srcRect/>
-          <a:stretch>
-            <a:fillRect/>
-          </a:stretch>
-        </a:blipFill>
-        <a:effectLst/>
+        <a:solidFill>
+          <a:srgbClr val="0B1911"/>
+        </a:solidFill>
       </p:bgPr>
     </p:bg>
     <p:spTree>
@@ -1012,6 +1481,804 @@
           <a:chExt cx="0" cy="0"/>
         </a:xfrm>
       </p:grpSpPr>
+      <p:sp>
+        <p:nvSpPr>
+          <p:cNvPr id="2" name="Shape 0"/>
+          <p:cNvSpPr/>
+          <p:nvPr/>
+        </p:nvSpPr>
+        <p:spPr>
+          <a:xfrm>
+            <a:off x="571500" y="495330"/>
+            <a:ext cx="2192091" cy="393466"/>
+          </a:xfrm>
+          <a:prstGeom prst="roundRect">
+            <a:avLst>
+              <a:gd name="adj" fmla="val 48408"/>
+            </a:avLst>
+          </a:prstGeom>
+          <a:solidFill>
+            <a:srgbClr val="064E3B"/>
+          </a:solidFill>
+          <a:ln w="9525">
+            <a:solidFill>
+              <a:srgbClr val="10B981"/>
+            </a:solidFill>
+            <a:prstDash val="solid"/>
+          </a:ln>
+        </p:spPr>
+      </p:sp>
+      <p:sp>
+        <p:nvSpPr>
+          <p:cNvPr id="3" name="Text 1"/>
+          <p:cNvSpPr txBox="1"/>
+          <p:nvPr/>
+        </p:nvSpPr>
+        <p:spPr>
+          <a:xfrm>
+            <a:off x="676290" y="541416"/>
+            <a:ext cx="2119031" cy="298369"/>
+          </a:xfrm>
+          <a:prstGeom prst="rect">
+            <a:avLst/>
+          </a:prstGeom>
+          <a:noFill/>
+          <a:ln/>
+        </p:spPr>
+        <p:txBody>
+          <a:bodyPr wrap="none" lIns="0" tIns="0" rIns="0" bIns="0" rtlCol="0" anchor="t"/>
+          <a:lstStyle/>
+          <a:p>
+            <a:pPr algn="l" indent="0" marL="0">
+              <a:lnSpc>
+                <a:spcPts val="2349"/>
+              </a:lnSpc>
+              <a:buNone/>
+            </a:pPr>
+            <a:r>
+              <a:rPr lang="en-US" sz="1566" b="1" spc="-54" kern="0" dirty="0">
+                <a:solidFill>
+                  <a:srgbClr val="34D399"/>
+                </a:solidFill>
+                <a:latin typeface="Malgun Gothic" pitchFamily="34" charset="0"/>
+                <a:ea typeface="Malgun Gothic" pitchFamily="34" charset="-122"/>
+                <a:cs typeface="Malgun Gothic" pitchFamily="34" charset="-120"/>
+              </a:rPr>
+              <a:t>3-PHASE EXECUTION</a:t>
+            </a:r>
+            <a:endParaRPr lang="en-US" sz="1566" dirty="0"/>
+          </a:p>
+        </p:txBody>
+      </p:sp>
+      <p:sp>
+        <p:nvSpPr>
+          <p:cNvPr id="4" name="Text 2"/>
+          <p:cNvSpPr txBox="1"/>
+          <p:nvPr/>
+        </p:nvSpPr>
+        <p:spPr>
+          <a:xfrm>
+            <a:off x="552480" y="936437"/>
+            <a:ext cx="11951940" cy="304770"/>
+          </a:xfrm>
+          <a:prstGeom prst="rect">
+            <a:avLst/>
+          </a:prstGeom>
+          <a:noFill/>
+          <a:ln/>
+        </p:spPr>
+        <p:txBody>
+          <a:bodyPr wrap="none" lIns="0" tIns="0" rIns="0" bIns="0" rtlCol="0" anchor="t"/>
+          <a:lstStyle/>
+          <a:p>
+            <a:pPr algn="l" indent="0" marL="0">
+              <a:lnSpc>
+                <a:spcPts val="2400"/>
+              </a:lnSpc>
+              <a:buNone/>
+            </a:pPr>
+            <a:r>
+              <a:rPr lang="en-US" sz="1920" b="1" spc="-54" kern="0" dirty="0">
+                <a:solidFill>
+                  <a:srgbClr val="FFFFFF"/>
+                </a:solidFill>
+                <a:latin typeface="Malgun Gothic" pitchFamily="34" charset="0"/>
+                <a:ea typeface="Malgun Gothic" pitchFamily="34" charset="-122"/>
+                <a:cs typeface="Malgun Gothic" pitchFamily="34" charset="-120"/>
+              </a:rPr>
+              <a:t>2026 ~ 2030 단계별 전력망 전환 타임라인</a:t>
+            </a:r>
+            <a:endParaRPr lang="en-US" sz="1920" dirty="0"/>
+          </a:p>
+        </p:txBody>
+      </p:sp>
+      <p:sp>
+        <p:nvSpPr>
+          <p:cNvPr id="5" name="Shape 3"/>
+          <p:cNvSpPr/>
+          <p:nvPr/>
+        </p:nvSpPr>
+        <p:spPr>
+          <a:xfrm>
+            <a:off x="571500" y="2366650"/>
+            <a:ext cx="3530498" cy="3200674"/>
+          </a:xfrm>
+          <a:prstGeom prst="roundRect">
+            <a:avLst>
+              <a:gd name="adj" fmla="val 3571"/>
+            </a:avLst>
+          </a:prstGeom>
+          <a:solidFill>
+            <a:srgbClr val="132E20"/>
+          </a:solidFill>
+          <a:ln w="9525">
+            <a:solidFill>
+              <a:srgbClr val="059669"/>
+            </a:solidFill>
+            <a:prstDash val="solid"/>
+          </a:ln>
+        </p:spPr>
+      </p:sp>
+      <p:sp>
+        <p:nvSpPr>
+          <p:cNvPr id="6" name="Shape 4"/>
+          <p:cNvSpPr/>
+          <p:nvPr/>
+        </p:nvSpPr>
+        <p:spPr>
+          <a:xfrm>
+            <a:off x="771571" y="2600005"/>
+            <a:ext cx="400050" cy="400050"/>
+          </a:xfrm>
+          <a:prstGeom prst="roundRect">
+            <a:avLst>
+              <a:gd name="adj" fmla="val 50011"/>
+            </a:avLst>
+          </a:prstGeom>
+          <a:solidFill>
+            <a:srgbClr val="10B981"/>
+          </a:solidFill>
+          <a:ln/>
+        </p:spPr>
+      </p:sp>
+      <p:sp>
+        <p:nvSpPr>
+          <p:cNvPr id="7" name="Text 5"/>
+          <p:cNvSpPr txBox="1"/>
+          <p:nvPr/>
+        </p:nvSpPr>
+        <p:spPr>
+          <a:xfrm>
+            <a:off x="752460" y="2614452"/>
+            <a:ext cx="476220" cy="352227"/>
+          </a:xfrm>
+          <a:prstGeom prst="rect">
+            <a:avLst/>
+          </a:prstGeom>
+          <a:noFill/>
+          <a:ln/>
+        </p:spPr>
+        <p:txBody>
+          <a:bodyPr wrap="none" lIns="0" tIns="0" rIns="0" bIns="0" rtlCol="0" anchor="t"/>
+          <a:lstStyle/>
+          <a:p>
+            <a:pPr algn="l" indent="0" marL="0">
+              <a:lnSpc>
+                <a:spcPts val="2773"/>
+              </a:lnSpc>
+              <a:buNone/>
+            </a:pPr>
+            <a:r>
+              <a:rPr lang="en-US" sz="1849" b="1" spc="-54" kern="0" dirty="0">
+                <a:solidFill>
+                  <a:srgbClr val="064E3B"/>
+                </a:solidFill>
+                <a:latin typeface="Malgun Gothic" pitchFamily="34" charset="0"/>
+                <a:ea typeface="Malgun Gothic" pitchFamily="34" charset="-122"/>
+                <a:cs typeface="Malgun Gothic" pitchFamily="34" charset="-120"/>
+              </a:rPr>
+              <a:t>'26</a:t>
+            </a:r>
+            <a:endParaRPr lang="en-US" sz="1849" dirty="0"/>
+          </a:p>
+        </p:txBody>
+      </p:sp>
+      <p:sp>
+        <p:nvSpPr>
+          <p:cNvPr id="8" name="Text 6"/>
+          <p:cNvSpPr txBox="1"/>
+          <p:nvPr/>
+        </p:nvSpPr>
+        <p:spPr>
+          <a:xfrm>
+            <a:off x="752460" y="3106400"/>
+            <a:ext cx="3400014" cy="435072"/>
+          </a:xfrm>
+          <a:prstGeom prst="rect">
+            <a:avLst/>
+          </a:prstGeom>
+          <a:noFill/>
+          <a:ln/>
+        </p:spPr>
+        <p:txBody>
+          <a:bodyPr wrap="none" lIns="0" tIns="0" rIns="0" bIns="0" rtlCol="0" anchor="t"/>
+          <a:lstStyle/>
+          <a:p>
+            <a:pPr algn="l" indent="0" marL="0">
+              <a:lnSpc>
+                <a:spcPts val="3426"/>
+              </a:lnSpc>
+              <a:buNone/>
+            </a:pPr>
+            <a:r>
+              <a:rPr lang="en-US" sz="2284" b="1" spc="-54" kern="0" dirty="0">
+                <a:solidFill>
+                  <a:srgbClr val="FFFFFF"/>
+                </a:solidFill>
+                <a:latin typeface="Malgun Gothic" pitchFamily="34" charset="0"/>
+                <a:ea typeface="Malgun Gothic" pitchFamily="34" charset="-122"/>
+                <a:cs typeface="Malgun Gothic" pitchFamily="34" charset="-120"/>
+              </a:rPr>
+              <a:t>Phase 1: VPP 인프라 구축</a:t>
+            </a:r>
+            <a:endParaRPr lang="en-US" sz="2284" dirty="0"/>
+          </a:p>
+        </p:txBody>
+      </p:sp>
+      <p:sp>
+        <p:nvSpPr>
+          <p:cNvPr id="9" name="Text 7"/>
+          <p:cNvSpPr txBox="1"/>
+          <p:nvPr/>
+        </p:nvSpPr>
+        <p:spPr>
+          <a:xfrm>
+            <a:off x="752460" y="3602736"/>
+            <a:ext cx="3168579" cy="994410"/>
+          </a:xfrm>
+          <a:prstGeom prst="rect">
+            <a:avLst/>
+          </a:prstGeom>
+          <a:noFill/>
+          <a:ln/>
+        </p:spPr>
+        <p:txBody>
+          <a:bodyPr wrap="square" lIns="0" tIns="0" rIns="0" bIns="0" rtlCol="0" anchor="t"/>
+          <a:lstStyle/>
+          <a:p>
+            <a:pPr algn="l" indent="0" marL="0">
+              <a:lnSpc>
+                <a:spcPts val="2610"/>
+              </a:lnSpc>
+              <a:buNone/>
+            </a:pPr>
+            <a:r>
+              <a:rPr lang="en-US" sz="1740" spc="-54" kern="0" dirty="0">
+                <a:solidFill>
+                  <a:srgbClr val="A7F3D0"/>
+                </a:solidFill>
+                <a:latin typeface="Malgun Gothic" pitchFamily="34" charset="0"/>
+                <a:ea typeface="Malgun Gothic" pitchFamily="34" charset="-122"/>
+                <a:cs typeface="Malgun Gothic" pitchFamily="34" charset="-120"/>
+              </a:rPr>
+              <a:t>• AI 기상 예측 모델링 도입</a:t>
+            </a:r>
+            <a:endParaRPr lang="en-US" sz="1740" dirty="0"/>
+          </a:p>
+          <a:p>
+            <a:pPr algn="l" indent="0" marL="0">
+              <a:lnSpc>
+                <a:spcPts val="2610"/>
+              </a:lnSpc>
+              <a:buNone/>
+            </a:pPr>
+            <a:r>
+              <a:rPr lang="en-US" sz="1740" spc="-54" kern="0" dirty="0">
+                <a:solidFill>
+                  <a:srgbClr val="A7F3D0"/>
+                </a:solidFill>
+                <a:latin typeface="Malgun Gothic" pitchFamily="34" charset="0"/>
+                <a:ea typeface="Malgun Gothic" pitchFamily="34" charset="-122"/>
+                <a:cs typeface="Malgun Gothic" pitchFamily="34" charset="-120"/>
+              </a:rPr>
+              <a:t>• 서해안 풍력 단지 100MW 실증</a:t>
+            </a:r>
+            <a:endParaRPr lang="en-US" sz="1740" dirty="0"/>
+          </a:p>
+          <a:p>
+            <a:pPr algn="l" indent="0" marL="0">
+              <a:lnSpc>
+                <a:spcPts val="2610"/>
+              </a:lnSpc>
+              <a:buNone/>
+            </a:pPr>
+            <a:r>
+              <a:rPr lang="en-US" sz="1740" spc="-54" kern="0" dirty="0">
+                <a:solidFill>
+                  <a:srgbClr val="A7F3D0"/>
+                </a:solidFill>
+                <a:latin typeface="Malgun Gothic" pitchFamily="34" charset="0"/>
+                <a:ea typeface="Malgun Gothic" pitchFamily="34" charset="-122"/>
+                <a:cs typeface="Malgun Gothic" pitchFamily="34" charset="-120"/>
+              </a:rPr>
+              <a:t>• 계통 연계 인허가 완료</a:t>
+            </a:r>
+            <a:endParaRPr lang="en-US" sz="1740" dirty="0"/>
+          </a:p>
+        </p:txBody>
+      </p:sp>
+      <p:sp>
+        <p:nvSpPr>
+          <p:cNvPr id="10" name="Shape 8"/>
+          <p:cNvSpPr/>
+          <p:nvPr/>
+        </p:nvSpPr>
+        <p:spPr>
+          <a:xfrm>
+            <a:off x="4330598" y="2366650"/>
+            <a:ext cx="3530590" cy="3200674"/>
+          </a:xfrm>
+          <a:prstGeom prst="roundRect">
+            <a:avLst>
+              <a:gd name="adj" fmla="val 3571"/>
+            </a:avLst>
+          </a:prstGeom>
+          <a:solidFill>
+            <a:srgbClr val="132E20"/>
+          </a:solidFill>
+          <a:ln w="9525">
+            <a:solidFill>
+              <a:srgbClr val="059669"/>
+            </a:solidFill>
+            <a:prstDash val="solid"/>
+          </a:ln>
+        </p:spPr>
+      </p:sp>
+      <p:sp>
+        <p:nvSpPr>
+          <p:cNvPr id="11" name="Shape 9"/>
+          <p:cNvSpPr/>
+          <p:nvPr/>
+        </p:nvSpPr>
+        <p:spPr>
+          <a:xfrm>
+            <a:off x="4530669" y="2600005"/>
+            <a:ext cx="400050" cy="400050"/>
+          </a:xfrm>
+          <a:prstGeom prst="roundRect">
+            <a:avLst>
+              <a:gd name="adj" fmla="val 50011"/>
+            </a:avLst>
+          </a:prstGeom>
+          <a:solidFill>
+            <a:srgbClr val="10B981"/>
+          </a:solidFill>
+          <a:ln/>
+        </p:spPr>
+      </p:sp>
+      <p:sp>
+        <p:nvSpPr>
+          <p:cNvPr id="12" name="Text 10"/>
+          <p:cNvSpPr txBox="1"/>
+          <p:nvPr/>
+        </p:nvSpPr>
+        <p:spPr>
+          <a:xfrm>
+            <a:off x="4511650" y="2614452"/>
+            <a:ext cx="476220" cy="352227"/>
+          </a:xfrm>
+          <a:prstGeom prst="rect">
+            <a:avLst/>
+          </a:prstGeom>
+          <a:noFill/>
+          <a:ln/>
+        </p:spPr>
+        <p:txBody>
+          <a:bodyPr wrap="none" lIns="0" tIns="0" rIns="0" bIns="0" rtlCol="0" anchor="t"/>
+          <a:lstStyle/>
+          <a:p>
+            <a:pPr algn="l" indent="0" marL="0">
+              <a:lnSpc>
+                <a:spcPts val="2773"/>
+              </a:lnSpc>
+              <a:buNone/>
+            </a:pPr>
+            <a:r>
+              <a:rPr lang="en-US" sz="1849" b="1" spc="-54" kern="0" dirty="0">
+                <a:solidFill>
+                  <a:srgbClr val="064E3B"/>
+                </a:solidFill>
+                <a:latin typeface="Malgun Gothic" pitchFamily="34" charset="0"/>
+                <a:ea typeface="Malgun Gothic" pitchFamily="34" charset="-122"/>
+                <a:cs typeface="Malgun Gothic" pitchFamily="34" charset="-120"/>
+              </a:rPr>
+              <a:t>'28</a:t>
+            </a:r>
+            <a:endParaRPr lang="en-US" sz="1849" dirty="0"/>
+          </a:p>
+        </p:txBody>
+      </p:sp>
+      <p:sp>
+        <p:nvSpPr>
+          <p:cNvPr id="13" name="Text 11"/>
+          <p:cNvSpPr txBox="1"/>
+          <p:nvPr/>
+        </p:nvSpPr>
+        <p:spPr>
+          <a:xfrm>
+            <a:off x="4511650" y="3106400"/>
+            <a:ext cx="3168670" cy="870143"/>
+          </a:xfrm>
+          <a:prstGeom prst="rect">
+            <a:avLst/>
+          </a:prstGeom>
+          <a:noFill/>
+          <a:ln/>
+        </p:spPr>
+        <p:txBody>
+          <a:bodyPr wrap="square" lIns="0" tIns="0" rIns="0" bIns="0" rtlCol="0" anchor="t"/>
+          <a:lstStyle/>
+          <a:p>
+            <a:pPr algn="l" indent="0" marL="0">
+              <a:lnSpc>
+                <a:spcPts val="3426"/>
+              </a:lnSpc>
+              <a:buNone/>
+            </a:pPr>
+            <a:r>
+              <a:rPr lang="en-US" sz="2284" b="1" spc="-54" kern="0" dirty="0">
+                <a:solidFill>
+                  <a:srgbClr val="FFFFFF"/>
+                </a:solidFill>
+                <a:latin typeface="Malgun Gothic" pitchFamily="34" charset="0"/>
+                <a:ea typeface="Malgun Gothic" pitchFamily="34" charset="-122"/>
+                <a:cs typeface="Malgun Gothic" pitchFamily="34" charset="-120"/>
+              </a:rPr>
+              <a:t>Phase 2: 하이브리드 ESS 확장</a:t>
+            </a:r>
+            <a:endParaRPr lang="en-US" sz="2284" dirty="0"/>
+          </a:p>
+        </p:txBody>
+      </p:sp>
+      <p:sp>
+        <p:nvSpPr>
+          <p:cNvPr id="14" name="Text 12"/>
+          <p:cNvSpPr txBox="1"/>
+          <p:nvPr/>
+        </p:nvSpPr>
+        <p:spPr>
+          <a:xfrm>
+            <a:off x="4511650" y="4037716"/>
+            <a:ext cx="3168670" cy="1325880"/>
+          </a:xfrm>
+          <a:prstGeom prst="rect">
+            <a:avLst/>
+          </a:prstGeom>
+          <a:noFill/>
+          <a:ln/>
+        </p:spPr>
+        <p:txBody>
+          <a:bodyPr wrap="square" lIns="0" tIns="0" rIns="0" bIns="0" rtlCol="0" anchor="t"/>
+          <a:lstStyle/>
+          <a:p>
+            <a:pPr algn="l" indent="0" marL="0">
+              <a:lnSpc>
+                <a:spcPts val="2610"/>
+              </a:lnSpc>
+              <a:buNone/>
+            </a:pPr>
+            <a:r>
+              <a:rPr lang="en-US" sz="1740" spc="-54" kern="0" dirty="0">
+                <a:solidFill>
+                  <a:srgbClr val="A7F3D0"/>
+                </a:solidFill>
+                <a:latin typeface="Malgun Gothic" pitchFamily="34" charset="0"/>
+                <a:ea typeface="Malgun Gothic" pitchFamily="34" charset="-122"/>
+                <a:cs typeface="Malgun Gothic" pitchFamily="34" charset="-120"/>
+              </a:rPr>
+              <a:t>• LFP + 바나듐 레독스 500MWh 배치</a:t>
+            </a:r>
+            <a:endParaRPr lang="en-US" sz="1740" dirty="0"/>
+          </a:p>
+          <a:p>
+            <a:pPr algn="l" indent="0" marL="0">
+              <a:lnSpc>
+                <a:spcPts val="2610"/>
+              </a:lnSpc>
+              <a:buNone/>
+            </a:pPr>
+            <a:r>
+              <a:rPr lang="en-US" sz="1740" spc="-54" kern="0" dirty="0">
+                <a:solidFill>
+                  <a:srgbClr val="A7F3D0"/>
+                </a:solidFill>
+                <a:latin typeface="Malgun Gothic" pitchFamily="34" charset="0"/>
+                <a:ea typeface="Malgun Gothic" pitchFamily="34" charset="-122"/>
+                <a:cs typeface="Malgun Gothic" pitchFamily="34" charset="-120"/>
+              </a:rPr>
+              <a:t>• P2P 분산 전력 거래 마켓 오픈</a:t>
+            </a:r>
+            <a:endParaRPr lang="en-US" sz="1740" dirty="0"/>
+          </a:p>
+          <a:p>
+            <a:pPr algn="l" indent="0" marL="0">
+              <a:lnSpc>
+                <a:spcPts val="2610"/>
+              </a:lnSpc>
+              <a:buNone/>
+            </a:pPr>
+            <a:r>
+              <a:rPr lang="en-US" sz="1740" spc="-54" kern="0" dirty="0">
+                <a:solidFill>
+                  <a:srgbClr val="A7F3D0"/>
+                </a:solidFill>
+                <a:latin typeface="Malgun Gothic" pitchFamily="34" charset="0"/>
+                <a:ea typeface="Malgun Gothic" pitchFamily="34" charset="-122"/>
+                <a:cs typeface="Malgun Gothic" pitchFamily="34" charset="-120"/>
+              </a:rPr>
+              <a:t>• 산업단지 RE100 직공급 개시</a:t>
+            </a:r>
+            <a:endParaRPr lang="en-US" sz="1740" dirty="0"/>
+          </a:p>
+        </p:txBody>
+      </p:sp>
+      <p:sp>
+        <p:nvSpPr>
+          <p:cNvPr id="15" name="Shape 13"/>
+          <p:cNvSpPr/>
+          <p:nvPr/>
+        </p:nvSpPr>
+        <p:spPr>
+          <a:xfrm>
+            <a:off x="8089880" y="2366650"/>
+            <a:ext cx="3530498" cy="3200674"/>
+          </a:xfrm>
+          <a:prstGeom prst="roundRect">
+            <a:avLst>
+              <a:gd name="adj" fmla="val 3571"/>
+            </a:avLst>
+          </a:prstGeom>
+          <a:solidFill>
+            <a:srgbClr val="1B3D2B"/>
+          </a:solidFill>
+          <a:ln w="9525">
+            <a:solidFill>
+              <a:srgbClr val="34D399"/>
+            </a:solidFill>
+            <a:prstDash val="solid"/>
+          </a:ln>
+        </p:spPr>
+      </p:sp>
+      <p:sp>
+        <p:nvSpPr>
+          <p:cNvPr id="16" name="Shape 14"/>
+          <p:cNvSpPr/>
+          <p:nvPr/>
+        </p:nvSpPr>
+        <p:spPr>
+          <a:xfrm>
+            <a:off x="8289859" y="2600005"/>
+            <a:ext cx="400050" cy="400050"/>
+          </a:xfrm>
+          <a:prstGeom prst="roundRect">
+            <a:avLst>
+              <a:gd name="adj" fmla="val 50011"/>
+            </a:avLst>
+          </a:prstGeom>
+          <a:solidFill>
+            <a:srgbClr val="34D399"/>
+          </a:solidFill>
+          <a:ln/>
+        </p:spPr>
+      </p:sp>
+      <p:sp>
+        <p:nvSpPr>
+          <p:cNvPr id="17" name="Text 15"/>
+          <p:cNvSpPr txBox="1"/>
+          <p:nvPr/>
+        </p:nvSpPr>
+        <p:spPr>
+          <a:xfrm>
+            <a:off x="8270839" y="2614452"/>
+            <a:ext cx="476220" cy="352227"/>
+          </a:xfrm>
+          <a:prstGeom prst="rect">
+            <a:avLst/>
+          </a:prstGeom>
+          <a:noFill/>
+          <a:ln/>
+        </p:spPr>
+        <p:txBody>
+          <a:bodyPr wrap="none" lIns="0" tIns="0" rIns="0" bIns="0" rtlCol="0" anchor="t"/>
+          <a:lstStyle/>
+          <a:p>
+            <a:pPr algn="l" indent="0" marL="0">
+              <a:lnSpc>
+                <a:spcPts val="2773"/>
+              </a:lnSpc>
+              <a:buNone/>
+            </a:pPr>
+            <a:r>
+              <a:rPr lang="en-US" sz="1849" b="1" spc="-54" kern="0" dirty="0">
+                <a:solidFill>
+                  <a:srgbClr val="064E3B"/>
+                </a:solidFill>
+                <a:latin typeface="Malgun Gothic" pitchFamily="34" charset="0"/>
+                <a:ea typeface="Malgun Gothic" pitchFamily="34" charset="-122"/>
+                <a:cs typeface="Malgun Gothic" pitchFamily="34" charset="-120"/>
+              </a:rPr>
+              <a:t>'30</a:t>
+            </a:r>
+            <a:endParaRPr lang="en-US" sz="1849" dirty="0"/>
+          </a:p>
+        </p:txBody>
+      </p:sp>
+      <p:sp>
+        <p:nvSpPr>
+          <p:cNvPr id="18" name="Text 16"/>
+          <p:cNvSpPr txBox="1"/>
+          <p:nvPr/>
+        </p:nvSpPr>
+        <p:spPr>
+          <a:xfrm>
+            <a:off x="8270839" y="3106400"/>
+            <a:ext cx="3168579" cy="870143"/>
+          </a:xfrm>
+          <a:prstGeom prst="rect">
+            <a:avLst/>
+          </a:prstGeom>
+          <a:noFill/>
+          <a:ln/>
+        </p:spPr>
+        <p:txBody>
+          <a:bodyPr wrap="square" lIns="0" tIns="0" rIns="0" bIns="0" rtlCol="0" anchor="t"/>
+          <a:lstStyle/>
+          <a:p>
+            <a:pPr algn="l" indent="0" marL="0">
+              <a:lnSpc>
+                <a:spcPts val="3426"/>
+              </a:lnSpc>
+              <a:buNone/>
+            </a:pPr>
+            <a:r>
+              <a:rPr lang="en-US" sz="2284" b="1" spc="-54" kern="0" dirty="0">
+                <a:solidFill>
+                  <a:srgbClr val="FFFFFF"/>
+                </a:solidFill>
+                <a:latin typeface="Malgun Gothic" pitchFamily="34" charset="0"/>
+                <a:ea typeface="Malgun Gothic" pitchFamily="34" charset="-122"/>
+                <a:cs typeface="Malgun Gothic" pitchFamily="34" charset="-120"/>
+              </a:rPr>
+              <a:t>Phase 3: 100% 탄소중립 그리드</a:t>
+            </a:r>
+            <a:endParaRPr lang="en-US" sz="2284" dirty="0"/>
+          </a:p>
+        </p:txBody>
+      </p:sp>
+      <p:sp>
+        <p:nvSpPr>
+          <p:cNvPr id="19" name="Text 17"/>
+          <p:cNvSpPr txBox="1"/>
+          <p:nvPr/>
+        </p:nvSpPr>
+        <p:spPr>
+          <a:xfrm>
+            <a:off x="8270839" y="4037716"/>
+            <a:ext cx="3168579" cy="994410"/>
+          </a:xfrm>
+          <a:prstGeom prst="rect">
+            <a:avLst/>
+          </a:prstGeom>
+          <a:noFill/>
+          <a:ln/>
+        </p:spPr>
+        <p:txBody>
+          <a:bodyPr wrap="square" lIns="0" tIns="0" rIns="0" bIns="0" rtlCol="0" anchor="t"/>
+          <a:lstStyle/>
+          <a:p>
+            <a:pPr algn="l" indent="0" marL="0">
+              <a:lnSpc>
+                <a:spcPts val="2610"/>
+              </a:lnSpc>
+              <a:buNone/>
+            </a:pPr>
+            <a:r>
+              <a:rPr lang="en-US" sz="1740" spc="-54" kern="0" dirty="0">
+                <a:solidFill>
+                  <a:srgbClr val="A7F3D0"/>
+                </a:solidFill>
+                <a:latin typeface="Malgun Gothic" pitchFamily="34" charset="0"/>
+                <a:ea typeface="Malgun Gothic" pitchFamily="34" charset="-122"/>
+                <a:cs typeface="Malgun Gothic" pitchFamily="34" charset="-120"/>
+              </a:rPr>
+              <a:t>• 전국 17개 시도 통합 계통망 완성</a:t>
+            </a:r>
+            <a:endParaRPr lang="en-US" sz="1740" dirty="0"/>
+          </a:p>
+          <a:p>
+            <a:pPr algn="l" indent="0" marL="0">
+              <a:lnSpc>
+                <a:spcPts val="2610"/>
+              </a:lnSpc>
+              <a:buNone/>
+            </a:pPr>
+            <a:r>
+              <a:rPr lang="en-US" sz="1740" spc="-54" kern="0" dirty="0">
+                <a:solidFill>
+                  <a:srgbClr val="A7F3D0"/>
+                </a:solidFill>
+                <a:latin typeface="Malgun Gothic" pitchFamily="34" charset="0"/>
+                <a:ea typeface="Malgun Gothic" pitchFamily="34" charset="-122"/>
+                <a:cs typeface="Malgun Gothic" pitchFamily="34" charset="-120"/>
+              </a:rPr>
+              <a:t>• 신재생 출력 제어율 0% 달성</a:t>
+            </a:r>
+            <a:endParaRPr lang="en-US" sz="1740" dirty="0"/>
+          </a:p>
+          <a:p>
+            <a:pPr algn="l" indent="0" marL="0">
+              <a:lnSpc>
+                <a:spcPts val="2610"/>
+              </a:lnSpc>
+              <a:buNone/>
+            </a:pPr>
+            <a:r>
+              <a:rPr lang="en-US" sz="1740" spc="-54" kern="0" dirty="0">
+                <a:solidFill>
+                  <a:srgbClr val="A7F3D0"/>
+                </a:solidFill>
+                <a:latin typeface="Malgun Gothic" pitchFamily="34" charset="0"/>
+                <a:ea typeface="Malgun Gothic" pitchFamily="34" charset="-122"/>
+                <a:cs typeface="Malgun Gothic" pitchFamily="34" charset="-120"/>
+              </a:rPr>
+              <a:t>• 연간 1,200만 톤 온실가스 감축</a:t>
+            </a:r>
+            <a:endParaRPr lang="en-US" sz="1740" dirty="0"/>
+          </a:p>
+        </p:txBody>
+      </p:sp>
+      <p:sp>
+        <p:nvSpPr>
+          <p:cNvPr id="20" name="Text 18"/>
+          <p:cNvSpPr txBox="1"/>
+          <p:nvPr/>
+        </p:nvSpPr>
+        <p:spPr>
+          <a:xfrm>
+            <a:off x="-312450" y="6229350"/>
+            <a:ext cx="11951940" cy="171450"/>
+          </a:xfrm>
+          <a:prstGeom prst="rect">
+            <a:avLst/>
+          </a:prstGeom>
+          <a:noFill/>
+          <a:ln/>
+        </p:spPr>
+        <p:txBody>
+          <a:bodyPr wrap="none" lIns="0" tIns="0" rIns="0" bIns="0" rtlCol="0" anchor="t"/>
+          <a:lstStyle/>
+          <a:p>
+            <a:pPr algn="r" indent="0" marL="0">
+              <a:lnSpc>
+                <a:spcPts val="1350"/>
+              </a:lnSpc>
+              <a:buNone/>
+            </a:pPr>
+            <a:r>
+              <a:rPr lang="en-US" sz="900" spc="-54" kern="0" dirty="0">
+                <a:solidFill>
+                  <a:srgbClr val="6EE7B7"/>
+                </a:solidFill>
+                <a:latin typeface="Malgun Gothic" pitchFamily="34" charset="0"/>
+                <a:ea typeface="Malgun Gothic" pitchFamily="34" charset="-122"/>
+                <a:cs typeface="Malgun Gothic" pitchFamily="34" charset="-120"/>
+              </a:rPr>
+              <a:t>* 국가 탄소중립녹색성장 기본계획 및 전력수급기본계획 연계</a:t>
+            </a:r>
+            <a:endParaRPr lang="en-US" sz="900" dirty="0"/>
+          </a:p>
+        </p:txBody>
+      </p:sp>
     </p:spTree>
   </p:cSld>
   <p:clrMapOvr>
